--- a/DR_Progress_v5.pptx
+++ b/DR_Progress_v5.pptx
@@ -22881,7 +22881,7 @@
                 </a:solidFill>
                 <a:latin typeface="Arial"/>
               </a:rPr>
-              <a:t>• Prepared, not yet run: APTOS size-stratified check</a:t>
+              <a:t>• APTOS size-stratified check (post-hoc): AUROC 0.984 to 0.989 within same-size groups, so size alone does not explain 0.99</a:t>
             </a:r>
           </a:p>
         </p:txBody>
@@ -22961,7 +22961,7 @@
                 </a:solidFill>
                 <a:latin typeface="Arial"/>
               </a:rPr>
-              <a:t>• Size-stratified and matched-subset checks for APTOS</a:t>
+              <a:t>• Matched-subset check for APTOS (other capture cues)</a:t>
             </a:r>
           </a:p>
           <a:p>
@@ -24535,7 +24535,7 @@
                 </a:solidFill>
                 <a:latin typeface="Arial"/>
               </a:rPr>
-              <a:t>Image size alone predicts APTOS early DR (AUROC 0.96): its 0.994 is not clean evidence of robustness.</a:t>
+              <a:t>Size alone predicts APTOS (0.96), but within same-size groups the models still score 0.984 to 0.989 (post-hoc). Other capture cues remain untested.</a:t>
             </a:r>
           </a:p>
         </p:txBody>
@@ -25115,7 +25115,7 @@
                 </a:solidFill>
                 <a:latin typeface="Arial"/>
               </a:rPr>
-              <a:t>1. Run the APTOS size-stratified check (saved predictions only)</a:t>
+              <a:t>1. Size check done: APTOS AUROC holds within same-size groups (0.984 to 0.989)</a:t>
             </a:r>
           </a:p>
           <a:p>

--- a/DR_Progress_v5.pptx
+++ b/DR_Progress_v5.pptx
@@ -16,6 +16,7 @@
     <p:sldId id="294" r:id="rId20"/>
     <p:sldId id="292" r:id="rId18"/>
     <p:sldId id="288" r:id="rId7"/>
+    <p:sldId id="309" r:id="rId35"/>
     <p:sldId id="295" r:id="rId21"/>
     <p:sldId id="304" r:id="rId30"/>
     <p:sldId id="305" r:id="rId31"/>
@@ -22257,7 +22258,7 @@
           <a:p>
             <a:r>
               <a:rPr lang="en-US" sz="1100" dirty="0"/>
-              <a:t>6</a:t>
+              <a:t>7</a:t>
             </a:r>
           </a:p>
         </p:txBody>
@@ -23132,7 +23133,7 @@
                 </a:solidFill>
                 <a:latin typeface="Arial"/>
               </a:rPr>
-              <a:t>Early DR (grades 1-2) vs No DR, mean of 3 seeds, threshold frozen on validation</a:t>
+              <a:t>A: DDR only. B: DDR + EyePACS, source-balanced. C: old merge. 3 seeds, threshold frozen</a:t>
             </a:r>
           </a:p>
         </p:txBody>
@@ -23167,7 +23168,7 @@
           <a:p>
             <a:r>
               <a:rPr lang="en-US" sz="1100" dirty="0"/>
-              <a:t>7</a:t>
+              <a:t>8</a:t>
             </a:r>
           </a:p>
         </p:txBody>
@@ -23613,7 +23614,7 @@
           <a:p>
             <a:r>
               <a:rPr lang="en-US" sz="1100" dirty="0"/>
-              <a:t>8</a:t>
+              <a:t>9</a:t>
             </a:r>
           </a:p>
         </p:txBody>
@@ -23999,7 +24000,7 @@
           <a:p>
             <a:r>
               <a:rPr lang="en-US" sz="1100" dirty="0"/>
-              <a:t>9</a:t>
+              <a:t>10</a:t>
             </a:r>
           </a:p>
         </p:txBody>
@@ -24403,7 +24404,7 @@
           <a:p>
             <a:r>
               <a:rPr lang="en-US" sz="1100" dirty="0"/>
-              <a:t>10</a:t>
+              <a:t>11</a:t>
             </a:r>
           </a:p>
         </p:txBody>
@@ -24849,7 +24850,7 @@
           <a:p>
             <a:r>
               <a:rPr lang="en-US" sz="1100" dirty="0"/>
-              <a:t>11</a:t>
+              <a:t>12</a:t>
             </a:r>
           </a:p>
         </p:txBody>
@@ -25188,6 +25189,428 @@
 </p:sld>
 </file>
 
+<file path=ppt/slides/slide28.xml><?xml version="1.0" encoding="utf-8"?>
+<p:sld xmlns:a="http://schemas.openxmlformats.org/drawingml/2006/main" xmlns:r="http://schemas.openxmlformats.org/officeDocument/2006/relationships" xmlns:p="http://schemas.openxmlformats.org/presentationml/2006/main">
+  <p:cSld>
+    <p:spTree>
+      <p:nvGrpSpPr>
+        <p:cNvPr id="1" name=""/>
+        <p:cNvGrpSpPr/>
+        <p:nvPr/>
+      </p:nvGrpSpPr>
+      <p:grpSpPr>
+        <a:xfrm>
+          <a:off x="0" y="0"/>
+          <a:ext cx="0" cy="0"/>
+          <a:chOff x="0" y="0"/>
+          <a:chExt cx="0" cy="0"/>
+        </a:xfrm>
+      </p:grpSpPr>
+      <p:sp>
+        <p:nvSpPr>
+          <p:cNvPr id="2" name="Title 1"/>
+          <p:cNvSpPr>
+            <a:spLocks noGrp="1"/>
+          </p:cNvSpPr>
+          <p:nvPr>
+            <p:ph type="title"/>
+          </p:nvPr>
+        </p:nvSpPr>
+        <p:spPr>
+          <a:xfrm>
+            <a:off x="713232" y="283464"/>
+            <a:ext cx="7909560" cy="502920"/>
+          </a:xfrm>
+        </p:spPr>
+        <p:txBody>
+          <a:bodyPr/>
+          <a:lstStyle/>
+          <a:p>
+            <a:pPr algn="l"/>
+            <a:r>
+              <a:rPr sz="2200" b="1">
+                <a:solidFill>
+                  <a:srgbClr val="121212"/>
+                </a:solidFill>
+                <a:latin typeface="Arial"/>
+              </a:rPr>
+              <a:t>The Three Data Arms</a:t>
+            </a:r>
+          </a:p>
+        </p:txBody>
+      </p:sp>
+      <p:sp>
+        <p:nvSpPr>
+          <p:cNvPr id="3" name="TextBox 2"/>
+          <p:cNvSpPr txBox="1"/>
+          <p:nvPr/>
+        </p:nvSpPr>
+        <p:spPr>
+          <a:xfrm>
+            <a:off x="566928" y="932688"/>
+            <a:ext cx="8138160" cy="256032"/>
+          </a:xfrm>
+          <a:prstGeom prst="rect">
+            <a:avLst/>
+          </a:prstGeom>
+          <a:noFill/>
+        </p:spPr>
+        <p:txBody>
+          <a:bodyPr wrap="square" lIns="27432" tIns="18288" rIns="27432" bIns="18288" anchor="t">
+            <a:spAutoFit/>
+          </a:bodyPr>
+          <a:lstStyle/>
+          <a:p>
+            <a:pPr algn="l"/>
+            <a:r>
+              <a:rPr sz="1480" b="1" i="0">
+                <a:solidFill>
+                  <a:srgbClr val="121212"/>
+                </a:solidFill>
+                <a:latin typeface="Arial"/>
+              </a:rPr>
+              <a:t>Exactly what each arm trains on</a:t>
+            </a:r>
+          </a:p>
+        </p:txBody>
+      </p:sp>
+      <p:sp>
+        <p:nvSpPr>
+          <p:cNvPr id="25" name="TextBox 24">
+            <a:extLst>
+              <a:ext uri="{FF2B5EF4-FFF2-40B4-BE49-F238E27FC236}">
+                <a16:creationId xmlns:a16="http://schemas.microsoft.com/office/drawing/2014/main" id="{6AB72007-F5D0-AF78-B89C-794457398D1F}"/>
+              </a:ext>
+            </a:extLst>
+          </p:cNvPr>
+          <p:cNvSpPr txBox="1"/>
+          <p:nvPr/>
+        </p:nvSpPr>
+        <p:spPr>
+          <a:xfrm>
+            <a:off x="8801100" y="4792436"/>
+            <a:ext cx="342900" cy="261610"/>
+          </a:xfrm>
+          <a:prstGeom prst="rect">
+            <a:avLst/>
+          </a:prstGeom>
+          <a:noFill/>
+        </p:spPr>
+        <p:txBody>
+          <a:bodyPr wrap="square" rtlCol="0">
+            <a:spAutoFit/>
+          </a:bodyPr>
+          <a:lstStyle/>
+          <a:p>
+            <a:r>
+              <a:rPr lang="en-US" sz="1100" dirty="0"/>
+              <a:t>6</a:t>
+            </a:r>
+          </a:p>
+        </p:txBody>
+      </p:sp>
+      <p:sp>
+        <p:nvSpPr>
+          <p:cNvPr id="201" name="Arm 1"/>
+          <p:cNvSpPr/>
+          <p:nvPr/>
+        </p:nvSpPr>
+        <p:spPr>
+          <a:xfrm>
+            <a:off x="502920" y="1280160"/>
+            <a:ext cx="2606040" cy="2926080"/>
+          </a:xfrm>
+          <a:prstGeom prst="roundRect">
+            <a:avLst>
+              <a:gd name="adj" fmla="val 6000"/>
+            </a:avLst>
+          </a:prstGeom>
+          <a:solidFill>
+            <a:srgbClr val="E4ECF6"/>
+          </a:solidFill>
+          <a:ln w="9525">
+            <a:solidFill>
+              <a:srgbClr val="BCCFE4"/>
+            </a:solidFill>
+          </a:ln>
+        </p:spPr>
+        <p:style>
+          <a:lnRef idx="1">
+            <a:schemeClr val="accent1"/>
+          </a:lnRef>
+          <a:fillRef idx="3">
+            <a:schemeClr val="accent1"/>
+          </a:fillRef>
+          <a:effectRef idx="2">
+            <a:schemeClr val="accent1"/>
+          </a:effectRef>
+          <a:fontRef idx="minor">
+            <a:schemeClr val="lt1"/>
+          </a:fontRef>
+        </p:style>
+        <p:txBody>
+          <a:bodyPr wrap="square" lIns="91440" tIns="36576" rIns="91440" bIns="36576" rtlCol="0" anchor="ctr"/>
+          <a:lstStyle/>
+          <a:p>
+            <a:pPr algn="l"/>
+            <a:r>
+              <a:rPr sz="1200" b="1">
+                <a:solidFill>
+                  <a:srgbClr val="121212"/>
+                </a:solidFill>
+                <a:latin typeface="Arial"/>
+              </a:rPr>
+              <a:t>A: DDR only</a:t>
+            </a:r>
+          </a:p>
+          <a:p>
+            <a:pPr algn="l"/>
+            <a:r>
+              <a:rPr sz="1050" b="0">
+                <a:solidFill>
+                  <a:srgbClr val="3a3a3a"/>
+                </a:solidFill>
+                <a:latin typeface="Arial"/>
+              </a:rPr>
+              <a:t>Trained on DDR alone. The clean baseline: it never sees EyePACS.</a:t>
+            </a:r>
+          </a:p>
+          <a:p>
+            <a:pPr algn="l"/>
+            <a:r>
+              <a:rPr sz="1050" b="1">
+                <a:solidFill>
+                  <a:srgbClr val="121212"/>
+                </a:solidFill>
+                <a:latin typeface="Arial"/>
+              </a:rPr>
+              <a:t>Role: baseline</a:t>
+            </a:r>
+          </a:p>
+        </p:txBody>
+      </p:sp>
+      <p:sp>
+        <p:nvSpPr>
+          <p:cNvPr id="202" name="Arm 2"/>
+          <p:cNvSpPr/>
+          <p:nvPr/>
+        </p:nvSpPr>
+        <p:spPr>
+          <a:xfrm>
+            <a:off x="3273552" y="1280160"/>
+            <a:ext cx="2606040" cy="2926080"/>
+          </a:xfrm>
+          <a:prstGeom prst="roundRect">
+            <a:avLst>
+              <a:gd name="adj" fmla="val 6000"/>
+            </a:avLst>
+          </a:prstGeom>
+          <a:solidFill>
+            <a:srgbClr val="E3F2EA"/>
+          </a:solidFill>
+          <a:ln w="9525">
+            <a:solidFill>
+              <a:srgbClr val="1E7A5A"/>
+            </a:solidFill>
+          </a:ln>
+        </p:spPr>
+        <p:style>
+          <a:lnRef idx="1">
+            <a:schemeClr val="accent1"/>
+          </a:lnRef>
+          <a:fillRef idx="3">
+            <a:schemeClr val="accent1"/>
+          </a:fillRef>
+          <a:effectRef idx="2">
+            <a:schemeClr val="accent1"/>
+          </a:effectRef>
+          <a:fontRef idx="minor">
+            <a:schemeClr val="lt1"/>
+          </a:fontRef>
+        </p:style>
+        <p:txBody>
+          <a:bodyPr wrap="square" lIns="91440" tIns="36576" rIns="91440" bIns="36576" rtlCol="0" anchor="ctr"/>
+          <a:lstStyle/>
+          <a:p>
+            <a:pPr algn="l"/>
+            <a:r>
+              <a:rPr sz="1200" b="1">
+                <a:solidFill>
+                  <a:srgbClr val="121212"/>
+                </a:solidFill>
+                <a:latin typeface="Arial"/>
+              </a:rPr>
+              <a:t>B: DDR + all EyePACS, source-balanced</a:t>
+            </a:r>
+          </a:p>
+          <a:p>
+            <a:pPr algn="l"/>
+            <a:r>
+              <a:rPr sz="1050" b="0">
+                <a:solidFill>
+                  <a:srgbClr val="3a3a3a"/>
+                </a:solidFill>
+                <a:latin typeface="Arial"/>
+              </a:rPr>
+              <a:t>All EyePACS grades are added. The sampler makes each source equally likely within every grade, so grade frequencies stay natural.</a:t>
+            </a:r>
+          </a:p>
+          <a:p>
+            <a:pPr algn="l"/>
+            <a:r>
+              <a:rPr sz="1050" b="1">
+                <a:solidFill>
+                  <a:srgbClr val="121212"/>
+                </a:solidFill>
+                <a:latin typeface="Arial"/>
+              </a:rPr>
+              <a:t>Role: does more data help without teaching the source?</a:t>
+            </a:r>
+          </a:p>
+        </p:txBody>
+      </p:sp>
+      <p:sp>
+        <p:nvSpPr>
+          <p:cNvPr id="203" name="Arm 3"/>
+          <p:cNvSpPr/>
+          <p:nvPr/>
+        </p:nvSpPr>
+        <p:spPr>
+          <a:xfrm>
+            <a:off x="6044183" y="1280160"/>
+            <a:ext cx="2606040" cy="2926080"/>
+          </a:xfrm>
+          <a:prstGeom prst="roundRect">
+            <a:avLst>
+              <a:gd name="adj" fmla="val 6000"/>
+            </a:avLst>
+          </a:prstGeom>
+          <a:solidFill>
+            <a:srgbClr val="FFE9D9"/>
+          </a:solidFill>
+          <a:ln w="9525">
+            <a:solidFill>
+              <a:srgbClr val="EB6834"/>
+            </a:solidFill>
+          </a:ln>
+        </p:spPr>
+        <p:style>
+          <a:lnRef idx="1">
+            <a:schemeClr val="accent1"/>
+          </a:lnRef>
+          <a:fillRef idx="3">
+            <a:schemeClr val="accent1"/>
+          </a:fillRef>
+          <a:effectRef idx="2">
+            <a:schemeClr val="accent1"/>
+          </a:effectRef>
+          <a:fontRef idx="minor">
+            <a:schemeClr val="lt1"/>
+          </a:fontRef>
+        </p:style>
+        <p:txBody>
+          <a:bodyPr wrap="square" lIns="91440" tIns="36576" rIns="91440" bIns="36576" rtlCol="0" anchor="ctr"/>
+          <a:lstStyle/>
+          <a:p>
+            <a:pPr algn="l"/>
+            <a:r>
+              <a:rPr sz="1200" b="1">
+                <a:solidFill>
+                  <a:srgbClr val="121212"/>
+                </a:solidFill>
+                <a:latin typeface="Arial"/>
+              </a:rPr>
+              <a:t>C: the old merge (negative control)</a:t>
+            </a:r>
+          </a:p>
+          <a:p>
+            <a:pPr algn="l"/>
+            <a:r>
+              <a:rPr sz="1050" b="0">
+                <a:solidFill>
+                  <a:srgbClr val="3a3a3a"/>
+                </a:solidFill>
+                <a:latin typeface="Arial"/>
+              </a:rPr>
+              <a:t>DDR plus only EyePACS grades 1, 3 and 4: no EyePACS No DR and no grade 2. EyePACS then supplies mostly disease images, so the dataset name predicts disease.</a:t>
+            </a:r>
+          </a:p>
+          <a:p>
+            <a:pPr algn="l"/>
+            <a:r>
+              <a:rPr sz="1050" b="1">
+                <a:solidFill>
+                  <a:srgbClr val="121212"/>
+                </a:solidFill>
+                <a:latin typeface="Arial"/>
+              </a:rPr>
+              <a:t>Role: a deliberately flawed control</a:t>
+            </a:r>
+          </a:p>
+        </p:txBody>
+      </p:sp>
+      <p:sp>
+        <p:nvSpPr>
+          <p:cNvPr id="204" name="Banner"/>
+          <p:cNvSpPr/>
+          <p:nvPr/>
+        </p:nvSpPr>
+        <p:spPr>
+          <a:xfrm>
+            <a:off x="502920" y="4315968"/>
+            <a:ext cx="8138160" cy="365760"/>
+          </a:xfrm>
+          <a:prstGeom prst="roundRect">
+            <a:avLst/>
+          </a:prstGeom>
+          <a:solidFill>
+            <a:srgbClr val="F2F5F8"/>
+          </a:solidFill>
+          <a:ln w="9525">
+            <a:solidFill>
+              <a:srgbClr val="CDD2D7"/>
+            </a:solidFill>
+          </a:ln>
+        </p:spPr>
+        <p:style>
+          <a:lnRef idx="1">
+            <a:schemeClr val="accent1"/>
+          </a:lnRef>
+          <a:fillRef idx="3">
+            <a:schemeClr val="accent1"/>
+          </a:fillRef>
+          <a:effectRef idx="2">
+            <a:schemeClr val="accent1"/>
+          </a:effectRef>
+          <a:fontRef idx="minor">
+            <a:schemeClr val="lt1"/>
+          </a:fontRef>
+        </p:style>
+        <p:txBody>
+          <a:bodyPr wrap="square" lIns="91440" tIns="36576" rIns="91440" bIns="36576" rtlCol="0" anchor="ctr"/>
+          <a:lstStyle/>
+          <a:p>
+            <a:pPr algn="ctr"/>
+            <a:r>
+              <a:rPr sz="1100" b="1">
+                <a:solidFill>
+                  <a:srgbClr val="121212"/>
+                </a:solidFill>
+                <a:latin typeface="Arial"/>
+              </a:rPr>
+              <a:t>Everything else is identical: model, image size, epochs, frozen splits and seeds.</a:t>
+            </a:r>
+          </a:p>
+        </p:txBody>
+      </p:sp>
+    </p:spTree>
+  </p:cSld>
+  <p:clrMapOvr>
+    <a:masterClrMapping/>
+  </p:clrMapOvr>
+</p:sld>
+</file>
+
 <file path=ppt/slides/slide6.xml><?xml version="1.0" encoding="utf-8"?>
 <p:sld xmlns:a="http://schemas.openxmlformats.org/drawingml/2006/main" xmlns:r="http://schemas.openxmlformats.org/officeDocument/2006/relationships" xmlns:p="http://schemas.openxmlformats.org/presentationml/2006/main">
   <p:cSld>
@@ -26059,7 +26482,7 @@
                 </a:solidFill>
                 <a:latin typeface="Arial"/>
               </a:rPr>
-              <a:t>• B: DDR + EyePACS, source-balanced</a:t>
+              <a:t>• B: DDR + all EyePACS grades, source-balanced</a:t>
             </a:r>
           </a:p>
           <a:p>
@@ -26078,7 +26501,7 @@
                 </a:solidFill>
                 <a:latin typeface="Arial"/>
               </a:rPr>
-              <a:t>• C: version 1 merge (negative control)</a:t>
+              <a:t>• C (control): DDR + EyePACS grades 1, 3, 4 only</a:t>
             </a:r>
           </a:p>
           <a:p>
@@ -26097,7 +26520,7 @@
                 </a:solidFill>
                 <a:latin typeface="Arial"/>
               </a:rPr>
-              <a:t>• C wins on its own test but not on APTOS = it learned the source</a:t>
+              <a:t>• C does well on its own test, not on unseen sources</a:t>
             </a:r>
           </a:p>
         </p:txBody>

--- a/DR_Progress_v5.pptx
+++ b/DR_Progress_v5.pptx
@@ -22790,7 +22790,7 @@
                 </a:solidFill>
                 <a:latin typeface="Arial"/>
               </a:rPr>
-              <a:t>• Checks: duplicates, image properties, augmentation; group DDR split built and arms retrained (1 seed) and evaluated</a:t>
+              <a:t>• Checks: duplicates, image properties, augmentation; group DDR split built and arms retrained (3 seeds) and evaluated</a:t>
             </a:r>
           </a:p>
         </p:txBody>
@@ -22858,7 +22858,7 @@
                 </a:solidFill>
                 <a:latin typeface="Arial"/>
               </a:rPr>
-              <a:t>• Group-split models evaluated once: no test result changed beyond seed noise</a:t>
+              <a:t>• Group-split models evaluated over 3 seeds: AUROC changed by at most 0.003 on DDR and APTOS</a:t>
             </a:r>
           </a:p>
           <a:p>

--- a/DR_Progress_v5.pptx
+++ b/DR_Progress_v5.pptx
@@ -22950,7 +22950,7 @@
                 </a:solidFill>
                 <a:latin typeface="Arial"/>
               </a:rPr>
-              <a:t>• Report AUROC, per-grade results and own-source operating points</a:t>
+              <a:t>• Own-source operating points (post-hoc)</a:t>
             </a:r>
           </a:p>
           <a:p>
@@ -22974,7 +22974,7 @@
                 </a:solidFill>
                 <a:latin typeface="Arial"/>
               </a:rPr>
-              <a:t>• Five seeds, intervals, ECE, Brier</a:t>
+              <a:t>• Literature search</a:t>
             </a:r>
           </a:p>
           <a:p>
@@ -24656,7 +24656,7 @@
                 </a:solidFill>
                 <a:latin typeface="Arial"/>
               </a:rPr>
-              <a:t>Not yet reported</a:t>
+              <a:t>Reported and post-hoc</a:t>
             </a:r>
           </a:p>
           <a:p>
@@ -24668,7 +24668,7 @@
                 </a:solidFill>
                 <a:latin typeface="Arial"/>
               </a:rPr>
-              <a:t>Confidence intervals, ECE, Brier and five seeds. Per-grade and specificity analyses are post-hoc.</a:t>
+              <a:t>Group-split results have 95% intervals, ECE and Brier over 3 seeds. Per-grade, specificity and size-strata analyses are post-hoc.</a:t>
             </a:r>
           </a:p>
         </p:txBody>
@@ -24982,7 +24982,7 @@
                 </a:solidFill>
                 <a:latin typeface="Arial"/>
               </a:rPr>
-              <a:t>Arm B: EyePACS specificity 0.89, AUROC 0.88; DDR sensitivity unchanged.</a:t>
+              <a:t>Arm B: EyePACS AUROC 0.884 (0.870-0.897), specificity 0.90, ECE 0.056 vs 0.326 (A) and 0.717 (C).</a:t>
             </a:r>
           </a:p>
         </p:txBody>
@@ -25152,7 +25152,7 @@
                 </a:solidFill>
                 <a:latin typeface="Arial"/>
               </a:rPr>
-              <a:t>4. Five seeds on the group split, intervals, ECE and Brier</a:t>
+              <a:t>4. More seeds only if needed: the spread over 3 seeds is small</a:t>
             </a:r>
           </a:p>
           <a:p>
